--- a/L1-L2-Tower-Demo.pptx
+++ b/L1-L2-Tower-Demo.pptx
@@ -2584,7 +2584,7 @@
                 <a:ea typeface="Calibri" pitchFamily="34" charset="-122"/>
                 <a:cs typeface="Calibri" pitchFamily="34" charset="-120"/>
               </a:rPr>
-              <a:t>Aditya Singh   ·   20 July 2026</a:t>
+              <a:t>Platform Engineering   ·   20 July 2026</a:t>
             </a:r>
             <a:endParaRPr lang="en-US" sz="1300" dirty="0"/>
           </a:p>
@@ -2623,7 +2623,7 @@
                 <a:ea typeface="Calibri" pitchFamily="34" charset="-122"/>
                 <a:cs typeface="Calibri" pitchFamily="34" charset="-120"/>
               </a:rPr>
-              <a:t>Design and build plan against the live instance singhaditya21.atlassian.net</a:t>
+              <a:t>Design and build plan against a live Jira Cloud instance</a:t>
             </a:r>
             <a:endParaRPr lang="en-US" sz="1100" dirty="0"/>
           </a:p>
@@ -5477,7 +5477,7 @@
                 <a:ea typeface="Calibri" pitchFamily="34" charset="-122"/>
                 <a:cs typeface="Calibri" pitchFamily="34" charset="-120"/>
               </a:rPr>
-              <a:t>Source: live survey of singhaditya21.atlassian.net, 20 July 2026 (PLAN.md §1, §4, security note)</a:t>
+              <a:t>Source: live survey of the Jira Cloud instance, 20 July 2026 (PLAN.md §1, §4, security note)</a:t>
             </a:r>
             <a:endParaRPr lang="en-US" sz="850" dirty="0"/>
           </a:p>
@@ -28466,7 +28466,7 @@
                 <a:ea typeface="Calibri" pitchFamily="34" charset="-122"/>
                 <a:cs typeface="Calibri" pitchFamily="34" charset="-120"/>
               </a:rPr>
-              <a:t>Source: live survey of singhaditya21.atlassian.net, 20 July 2026 (PLAN.md §1–§2)</a:t>
+              <a:t>Source: live survey of the Jira Cloud instance, 20 July 2026 (PLAN.md §1–§2)</a:t>
             </a:r>
             <a:endParaRPr lang="en-US" sz="850" dirty="0"/>
           </a:p>
